--- a/dist/초3/영어/읽기와문화/초3_영어_읽기와문화_01_그림보고낱말읽기.pptx
+++ b/dist/초3/영어/읽기와문화/초3_영어_읽기와문화_01_그림보고낱말읽기.pptx
@@ -121,13 +121,13 @@
   <p:extLst>
     <p:ext uri="{521415D9-36F7-43E2-AB2F-B90AF26B5E84}">
       <p14:sectionLst xmlns:p14="http://schemas.microsoft.com/office/powerpoint/2010/main">
-        <p14:section name="도입" id="{c45de9ca-dfd0-dbe2-9253-a5b17cdc22f9}">
+        <p14:section name="도입" id="{7ab32859-fbc9-c57d-0b54-b349d933d742}">
           <p14:sldIdLst>
             <p14:sldId id="256"/>
             <p14:sldId id="257"/>
           </p14:sldIdLst>
         </p14:section>
-        <p14:section name="개념" id="{2abd5fbd-3433-1b9d-99c2-f0ec87bb3ccd}">
+        <p14:section name="개념" id="{af2a1a41-558c-079f-77a6-77a9a21a3453}">
           <p14:sldIdLst>
             <p14:sldId id="258"/>
             <p14:sldId id="259"/>
@@ -135,7 +135,7 @@
             <p14:sldId id="263"/>
           </p14:sldIdLst>
         </p14:section>
-        <p14:section name="연습" id="{142f0f7b-d823-1d29-3fa8-325f37a21e90}">
+        <p14:section name="연습" id="{8b2bd442-b934-e772-159e-e02903c39fdf}">
           <p14:sldIdLst>
             <p14:sldId id="260"/>
             <p14:sldId id="262"/>
@@ -143,31 +143,31 @@
             <p14:sldId id="265"/>
           </p14:sldIdLst>
         </p14:section>
-        <p14:section name="개념" id="{5392ccac-f1c6-03ec-6934-b875ea7bf62b}">
+        <p14:section name="개념" id="{8b4d7037-300a-d3e2-8615-1558c6968b16}">
           <p14:sldIdLst/>
         </p14:section>
-        <p14:section name="연습" id="{1dced337-ca6e-e2da-ab2b-d148cb30f8b1}">
+        <p14:section name="연습" id="{6696a6b3-e2a8-9bfd-2daf-dcec25e7aacb}">
           <p14:sldIdLst/>
         </p14:section>
-        <p14:section name="개념" id="{f99f2845-5d7e-27f3-1bf4-b159da7d2c25}">
+        <p14:section name="개념" id="{bb7c51da-fde4-d210-1e0e-96d596aa4f44}">
           <p14:sldIdLst/>
         </p14:section>
-        <p14:section name="연습" id="{d19a69ba-c4e3-5dcd-f3d4-0e4c90a14785}">
+        <p14:section name="연습" id="{a2a7f049-9fad-6864-cd51-847a6f850888}">
           <p14:sldIdLst/>
         </p14:section>
-        <p14:section name="확인" id="{29e932ac-fe34-908d-e04e-030722a3dcd3}">
+        <p14:section name="확인" id="{80a9abda-be94-0884-3c81-d3060da7361e}">
           <p14:sldIdLst>
             <p14:sldId id="266"/>
             <p14:sldId id="267"/>
             <p14:sldId id="268"/>
           </p14:sldIdLst>
         </p14:section>
-        <p14:section name="정리" id="{c276f9f3-6367-4429-ffb9-87f0141b25e4}">
+        <p14:section name="정리" id="{2b9491b0-1624-aa40-f46a-a19e8a60e191}">
           <p14:sldIdLst>
             <p14:sldId id="269"/>
           </p14:sldIdLst>
         </p14:section>
-        <p14:section name="보충" id="{d92de521-9a0e-7fc5-73f4-b939740f224a}">
+        <p14:section name="보충" id="{b58a5d10-75a7-0646-87af-fb701058f9a6}">
           <p14:sldIdLst>
             <p14:sldId id="270"/>
           </p14:sldIdLst>

--- a/dist/초3/영어/읽기와문화/초3_영어_읽기와문화_01_그림보고낱말읽기.pptx
+++ b/dist/초3/영어/읽기와문화/초3_영어_읽기와문화_01_그림보고낱말읽기.pptx
@@ -121,13 +121,13 @@
   <p:extLst>
     <p:ext uri="{521415D9-36F7-43E2-AB2F-B90AF26B5E84}">
       <p14:sectionLst xmlns:p14="http://schemas.microsoft.com/office/powerpoint/2010/main">
-        <p14:section name="도입" id="{7ab32859-fbc9-c57d-0b54-b349d933d742}">
+        <p14:section name="도입" id="{7d1fbc86-1fc2-81c1-4254-62f35046218e}">
           <p14:sldIdLst>
             <p14:sldId id="256"/>
             <p14:sldId id="257"/>
           </p14:sldIdLst>
         </p14:section>
-        <p14:section name="개념" id="{af2a1a41-558c-079f-77a6-77a9a21a3453}">
+        <p14:section name="개념" id="{84ad7ee4-1519-11c4-d14b-30226e9e4b62}">
           <p14:sldIdLst>
             <p14:sldId id="258"/>
             <p14:sldId id="259"/>
@@ -135,7 +135,7 @@
             <p14:sldId id="263"/>
           </p14:sldIdLst>
         </p14:section>
-        <p14:section name="연습" id="{8b2bd442-b934-e772-159e-e02903c39fdf}">
+        <p14:section name="연습" id="{80c9148b-b4e0-513a-0adb-3fc6f2cb2b24}">
           <p14:sldIdLst>
             <p14:sldId id="260"/>
             <p14:sldId id="262"/>
@@ -143,31 +143,31 @@
             <p14:sldId id="265"/>
           </p14:sldIdLst>
         </p14:section>
-        <p14:section name="개념" id="{8b4d7037-300a-d3e2-8615-1558c6968b16}">
+        <p14:section name="개념" id="{b5af30ce-46c7-27ea-fb7a-52a378e7218b}">
           <p14:sldIdLst/>
         </p14:section>
-        <p14:section name="연습" id="{6696a6b3-e2a8-9bfd-2daf-dcec25e7aacb}">
+        <p14:section name="연습" id="{40513704-cc90-926c-f060-482a408d8e46}">
           <p14:sldIdLst/>
         </p14:section>
-        <p14:section name="개념" id="{bb7c51da-fde4-d210-1e0e-96d596aa4f44}">
+        <p14:section name="개념" id="{5a6d661f-716d-0d0d-2273-e0194a714908}">
           <p14:sldIdLst/>
         </p14:section>
-        <p14:section name="연습" id="{a2a7f049-9fad-6864-cd51-847a6f850888}">
+        <p14:section name="연습" id="{f1083d19-38ba-6f1d-f595-756048ee2d3f}">
           <p14:sldIdLst/>
         </p14:section>
-        <p14:section name="확인" id="{80a9abda-be94-0884-3c81-d3060da7361e}">
+        <p14:section name="확인" id="{c0b30331-9d2d-6e67-05e5-ac2909431dc1}">
           <p14:sldIdLst>
             <p14:sldId id="266"/>
             <p14:sldId id="267"/>
             <p14:sldId id="268"/>
           </p14:sldIdLst>
         </p14:section>
-        <p14:section name="정리" id="{2b9491b0-1624-aa40-f46a-a19e8a60e191}">
+        <p14:section name="정리" id="{94e36058-ac15-b88b-f94a-a4f03b04fd92}">
           <p14:sldIdLst>
             <p14:sldId id="269"/>
           </p14:sldIdLst>
         </p14:section>
-        <p14:section name="보충" id="{b58a5d10-75a7-0646-87af-fb701058f9a6}">
+        <p14:section name="보충" id="{1b365953-3cd1-af6d-1033-cacfbdbc2e55}">
           <p14:sldIdLst>
             <p14:sldId id="270"/>
           </p14:sldIdLst>

--- a/dist/초3/영어/읽기와문화/초3_영어_읽기와문화_01_그림보고낱말읽기.pptx
+++ b/dist/초3/영어/읽기와문화/초3_영어_읽기와문화_01_그림보고낱말읽기.pptx
@@ -121,13 +121,13 @@
   <p:extLst>
     <p:ext uri="{521415D9-36F7-43E2-AB2F-B90AF26B5E84}">
       <p14:sectionLst xmlns:p14="http://schemas.microsoft.com/office/powerpoint/2010/main">
-        <p14:section name="도입" id="{7d1fbc86-1fc2-81c1-4254-62f35046218e}">
+        <p14:section name="도입" id="{31e4791c-e8df-23e7-3b45-2b5a6eaca928}">
           <p14:sldIdLst>
             <p14:sldId id="256"/>
             <p14:sldId id="257"/>
           </p14:sldIdLst>
         </p14:section>
-        <p14:section name="개념" id="{84ad7ee4-1519-11c4-d14b-30226e9e4b62}">
+        <p14:section name="개념" id="{a9c9cd4b-b43a-324b-e2c3-3f958c2e1282}">
           <p14:sldIdLst>
             <p14:sldId id="258"/>
             <p14:sldId id="259"/>
@@ -135,7 +135,7 @@
             <p14:sldId id="263"/>
           </p14:sldIdLst>
         </p14:section>
-        <p14:section name="연습" id="{80c9148b-b4e0-513a-0adb-3fc6f2cb2b24}">
+        <p14:section name="연습" id="{984a227d-fa28-9d0f-1662-d9117faa4878}">
           <p14:sldIdLst>
             <p14:sldId id="260"/>
             <p14:sldId id="262"/>
@@ -143,31 +143,31 @@
             <p14:sldId id="265"/>
           </p14:sldIdLst>
         </p14:section>
-        <p14:section name="개념" id="{b5af30ce-46c7-27ea-fb7a-52a378e7218b}">
+        <p14:section name="개념" id="{c3a4aa81-5c7d-e237-70e9-c93092c050f7}">
           <p14:sldIdLst/>
         </p14:section>
-        <p14:section name="연습" id="{40513704-cc90-926c-f060-482a408d8e46}">
+        <p14:section name="연습" id="{3095c617-5224-94e2-8746-5eb4655407d9}">
           <p14:sldIdLst/>
         </p14:section>
-        <p14:section name="개념" id="{5a6d661f-716d-0d0d-2273-e0194a714908}">
+        <p14:section name="개념" id="{fa97aefa-0619-0c0e-dfae-285d6bf498c6}">
           <p14:sldIdLst/>
         </p14:section>
-        <p14:section name="연습" id="{f1083d19-38ba-6f1d-f595-756048ee2d3f}">
+        <p14:section name="연습" id="{865a1784-adba-90a4-c61f-620ae4098b93}">
           <p14:sldIdLst/>
         </p14:section>
-        <p14:section name="확인" id="{c0b30331-9d2d-6e67-05e5-ac2909431dc1}">
+        <p14:section name="확인" id="{6b36aa6e-4359-d1d2-0281-ddb0908a0d31}">
           <p14:sldIdLst>
             <p14:sldId id="266"/>
             <p14:sldId id="267"/>
             <p14:sldId id="268"/>
           </p14:sldIdLst>
         </p14:section>
-        <p14:section name="정리" id="{94e36058-ac15-b88b-f94a-a4f03b04fd92}">
+        <p14:section name="정리" id="{0cfb2161-28e8-5c22-53e0-fda1c3dd29e9}">
           <p14:sldIdLst>
             <p14:sldId id="269"/>
           </p14:sldIdLst>
         </p14:section>
-        <p14:section name="보충" id="{1b365953-3cd1-af6d-1033-cacfbdbc2e55}">
+        <p14:section name="보충" id="{98e67853-a552-b77a-880d-c585918da248}">
           <p14:sldIdLst>
             <p14:sldId id="270"/>
           </p14:sldIdLst>
@@ -1180,7 +1180,7 @@
 막히면
 - 대문자 카드와 소문자 카드를 짝 지어 놓고 이름을 함께 말합니다.
 주의
-- 이 차시는 계획상 바로 앞 차시가 없지만, 낱말을 읽으려면 소문자를 알아야 합니다. 보충 뒤에도 소문자 이름을 절반 넘게 말하지 못하면 ‘소문자와 첫소리’(KR22-G03-ENG-LOWER-L01)를 먼저 하고 이 차시를 시작합니다.</a:t>
+- 낱말을 읽으려면 소문자를 알아야 합니다. 보충 뒤에도 소문자 이름을 절반 넘게 말하지 못하면 ‘소문자와 첫소리’(KR22-G03-ENG-LOWER-L01)를 먼저 하고 이 차시를 시작합니다.</a:t>
             </a:r>
             <a:endParaRPr lang="en-US" dirty="0"/>
           </a:p>
